--- a/PROJECT  B PRESENTATION TEMPLATE  (1) (1) (1).pptx
+++ b/PROJECT  B PRESENTATION TEMPLATE  (1) (1) (1).pptx
@@ -5960,19 +5960,16 @@
           </a:bodyPr>
           <a:lstStyle/>
           <a:p>
-            <a:r>
-              <a:rPr lang="en-US" sz="2400" b="1" dirty="0" smtClean="0">
-                <a:latin typeface="Cambria"/>
-                <a:cs typeface="Cambria"/>
-              </a:rPr>
-              <a:t>PROJECT </a:t>
-            </a:r>
-            <a:r>
-              <a:rPr lang="en-US" sz="2400" b="1" dirty="0" smtClean="0">
-                <a:latin typeface="Cambria"/>
-                <a:cs typeface="Cambria"/>
-              </a:rPr>
-              <a:t>B</a:t>
+            <a:pPr algn="ctr">
+              <a:defRPr sz="2800" b="1">
+                <a:solidFill>
+                  <a:srgbClr val="FFFFFF"/>
+                </a:solidFill>
+                <a:latin typeface="Calibri"/>
+              </a:defRPr>
+            </a:pPr>
+            <a:r>
+              <a:t>LABORATORY INFORMATION MANAGEMENT SYSTEM FOR YALA SUB-COUNTY HOSPITAL</a:t>
             </a:r>
             <a:endParaRPr lang="en-US" sz="2400" b="1" dirty="0">
               <a:latin typeface="Cambria"/>
@@ -5999,54 +5996,142 @@
         </p:nvSpPr>
         <p:spPr>
           <a:xfrm>
-            <a:off x="2614005" y="3470002"/>
-            <a:ext cx="6894062" cy="1867468"/>
+            <a:off x="1371600" y="2926080"/>
+            <a:ext cx="9418320" cy="3108960"/>
           </a:xfrm>
         </p:spPr>
         <p:txBody>
-          <a:bodyPr>
+          <a:bodyPr wrap="square">
             <a:normAutofit/>
           </a:bodyPr>
           <a:lstStyle/>
           <a:p>
-            <a:r>
-              <a:rPr lang="en-US" sz="2000" b="1" dirty="0" smtClean="0">
-                <a:latin typeface="Cambria"/>
-                <a:cs typeface="Cambria"/>
+            <a:pPr algn="ctr">
+              <a:spcAft>
+                <a:spcPts val="400"/>
+              </a:spcAft>
+            </a:pPr>
+            <a:r>
+              <a:rPr sz="2000" b="1">
+                <a:solidFill>
+                  <a:srgbClr val="FFBF00"/>
+                </a:solidFill>
+                <a:latin typeface="Calibri"/>
               </a:rPr>
-              <a:t>PROJECT TITLE:</a:t>
-            </a:r>
-          </a:p>
-          <a:p>
-            <a:r>
-              <a:rPr lang="en-US" sz="2000" b="1" dirty="0" smtClean="0">
-                <a:latin typeface="Cambria"/>
-                <a:cs typeface="Cambria"/>
+              <a:t>Final Project Defense Presentation (Project B)</a:t>
+            </a:r>
+          </a:p>
+          <a:p>
+            <a:pPr algn="ctr">
+              <a:spcAft>
+                <a:spcPts val="400"/>
+              </a:spcAft>
+            </a:pPr>
+            <a:r>
+              <a:rPr sz="1800" b="1">
+                <a:solidFill>
+                  <a:srgbClr val="FFFFFF"/>
+                </a:solidFill>
+                <a:latin typeface="Calibri"/>
               </a:rPr>
-              <a:t>PRESENTER:</a:t>
-            </a:r>
-          </a:p>
-          <a:p>
-            <a:r>
-              <a:rPr lang="en-US" sz="2000" b="1" dirty="0" smtClean="0">
-                <a:latin typeface="Cambria"/>
-                <a:cs typeface="Cambria"/>
+              <a:t>Candidate: Owuor Collins  |  Reg No: SCCI/01227/2022</a:t>
+            </a:r>
+          </a:p>
+          <a:p>
+            <a:pPr algn="ctr">
+              <a:spcAft>
+                <a:spcPts val="400"/>
+              </a:spcAft>
+            </a:pPr>
+            <a:r>
+              <a:rPr sz="1500" b="0">
+                <a:solidFill>
+                  <a:srgbClr val="DCE6F2"/>
+                </a:solidFill>
+                <a:latin typeface="Calibri"/>
               </a:rPr>
-              <a:t>REGNO:</a:t>
-            </a:r>
-          </a:p>
-          <a:p>
-            <a:r>
-              <a:rPr lang="en-US" sz="2000" b="1" dirty="0" smtClean="0">
-                <a:latin typeface="Cambria"/>
-                <a:cs typeface="Cambria"/>
+              <a:t>Programme: Bachelor of Technology in Information Technology</a:t>
+            </a:r>
+          </a:p>
+          <a:p>
+            <a:pPr algn="ctr">
+              <a:spcAft>
+                <a:spcPts val="400"/>
+              </a:spcAft>
+            </a:pPr>
+            <a:r>
+              <a:rPr sz="1400" b="0">
+                <a:solidFill>
+                  <a:srgbClr val="C8D7EB"/>
+                </a:solidFill>
+                <a:latin typeface="Calibri"/>
               </a:rPr>
-              <a:t>DATE:</a:t>
-            </a:r>
-            <a:endParaRPr lang="en-US" sz="2000" b="1" dirty="0">
-              <a:latin typeface="Cambria"/>
-              <a:cs typeface="Cambria"/>
-            </a:endParaRPr>
+              <a:t>Faculty of Applied Sciences &amp; Technology | School of Computing and Information Technology (SCIT)</a:t>
+            </a:r>
+          </a:p>
+          <a:p>
+            <a:pPr algn="ctr">
+              <a:spcAft>
+                <a:spcPts val="400"/>
+              </a:spcAft>
+            </a:pPr>
+            <a:r>
+              <a:rPr sz="1400" b="0">
+                <a:solidFill>
+                  <a:srgbClr val="C8D7EB"/>
+                </a:solidFill>
+                <a:latin typeface="Calibri"/>
+              </a:rPr>
+              <a:t>Department of Computer Science and Informatics</a:t>
+            </a:r>
+          </a:p>
+          <a:p>
+            <a:pPr algn="ctr">
+              <a:spcAft>
+                <a:spcPts val="400"/>
+              </a:spcAft>
+            </a:pPr>
+            <a:r>
+              <a:rPr sz="1500" b="1">
+                <a:solidFill>
+                  <a:srgbClr val="FFFFFF"/>
+                </a:solidFill>
+                <a:latin typeface="Calibri"/>
+              </a:rPr>
+              <a:t>Institution: The Technical University of Kenya (TUK)</a:t>
+            </a:r>
+          </a:p>
+          <a:p>
+            <a:pPr algn="ctr">
+              <a:spcAft>
+                <a:spcPts val="400"/>
+              </a:spcAft>
+            </a:pPr>
+            <a:r>
+              <a:rPr sz="1500" b="1">
+                <a:solidFill>
+                  <a:srgbClr val="FFFFFF"/>
+                </a:solidFill>
+                <a:latin typeface="Calibri"/>
+              </a:rPr>
+              <a:t>Supervisors: Dr. Edwin Ngwawe &amp; Mr. Peter Maina Kariuki</a:t>
+            </a:r>
+          </a:p>
+          <a:p>
+            <a:pPr algn="ctr">
+              <a:spcAft>
+                <a:spcPts val="400"/>
+              </a:spcAft>
+            </a:pPr>
+            <a:r>
+              <a:rPr sz="1400" b="0">
+                <a:solidFill>
+                  <a:srgbClr val="B4C8DC"/>
+                </a:solidFill>
+                <a:latin typeface="Calibri"/>
+              </a:rPr>
+              <a:t>Academic Year: 2025 / 2026</a:t>
+            </a:r>
           </a:p>
         </p:txBody>
       </p:sp>
@@ -7876,16 +7961,156 @@
           </a:bodyPr>
           <a:lstStyle/>
           <a:p>
+            <a:pPr>
+              <a:spcAft>
+                <a:spcPts val="400"/>
+              </a:spcAft>
+              <a:defRPr sz="1700" b="1">
+                <a:solidFill>
+                  <a:srgbClr val="1E293B"/>
+                </a:solidFill>
+                <a:latin typeface="Calibri"/>
+              </a:defRPr>
+            </a:pPr>
+            <a:r>
+              <a:t>General Objective:</a:t>
+            </a:r>
             <a:endParaRPr lang="en-US" sz="2400" b="1" dirty="0">
               <a:latin typeface="Cambria"/>
               <a:cs typeface="Cambria"/>
             </a:endParaRPr>
           </a:p>
           <a:p>
-            <a:endParaRPr lang="en-US" sz="2400" b="1" dirty="0">
-              <a:latin typeface="Cambria"/>
-              <a:cs typeface="Cambria"/>
-            </a:endParaRPr>
+            <a:pPr>
+              <a:spcAft>
+                <a:spcPts val="1000"/>
+              </a:spcAft>
+              <a:defRPr sz="1400">
+                <a:solidFill>
+                  <a:srgbClr val="334155"/>
+                </a:solidFill>
+                <a:latin typeface="Calibri"/>
+              </a:defRPr>
+            </a:pPr>
+            <a:r>
+              <a:t>Develop a web-based Laboratory Information Management System (LIMS) for Yala Sub-County Hospital to automate diagnostic workflows, reduce clinical turnaround times, and secure revenue collection.</a:t>
+            </a:r>
+          </a:p>
+          <a:p>
+            <a:pPr>
+              <a:spcAft>
+                <a:spcPts val="400"/>
+              </a:spcAft>
+              <a:defRPr sz="1700" b="1">
+                <a:solidFill>
+                  <a:srgbClr val="1E293B"/>
+                </a:solidFill>
+                <a:latin typeface="Calibri"/>
+              </a:defRPr>
+            </a:pPr>
+            <a:r>
+              <a:t>Specific Objectives (100% Achieved):</a:t>
+            </a:r>
+          </a:p>
+          <a:p>
+            <a:pPr>
+              <a:spcAft>
+                <a:spcPts val="600"/>
+              </a:spcAft>
+            </a:pPr>
+            <a:r>
+              <a:rPr sz="1350" b="1">
+                <a:solidFill>
+                  <a:srgbClr val="0E7490"/>
+                </a:solidFill>
+                <a:latin typeface="Calibri"/>
+              </a:rPr>
+              <a:t>1. Analyze: </a:t>
+            </a:r>
+            <a:r>
+              <a:rPr sz="1300">
+                <a:solidFill>
+                  <a:srgbClr val="334155"/>
+                </a:solidFill>
+                <a:latin typeface="Calibri"/>
+              </a:rPr>
+              <a:t>Analyze current manual laboratory and billing workflows to determine functional and non-functional system requirements.</a:t>
+            </a:r>
+          </a:p>
+          <a:p>
+            <a:pPr>
+              <a:spcAft>
+                <a:spcPts val="600"/>
+              </a:spcAft>
+            </a:pPr>
+            <a:r>
+              <a:rPr sz="1350" b="1">
+                <a:solidFill>
+                  <a:srgbClr val="0E7490"/>
+                </a:solidFill>
+                <a:latin typeface="Calibri"/>
+              </a:rPr>
+              <a:t>2. Design: </a:t>
+            </a:r>
+            <a:r>
+              <a:rPr sz="1300">
+                <a:solidFill>
+                  <a:srgbClr val="334155"/>
+                </a:solidFill>
+                <a:latin typeface="Calibri"/>
+              </a:rPr>
+              <a:t>Design a 3-tier system architecture, normalized relational database schema, and Role-Based Access Control (RBAC) model.</a:t>
+            </a:r>
+          </a:p>
+          <a:p>
+            <a:pPr>
+              <a:spcAft>
+                <a:spcPts val="600"/>
+              </a:spcAft>
+            </a:pPr>
+            <a:r>
+              <a:rPr sz="1350" b="1">
+                <a:solidFill>
+                  <a:srgbClr val="0E7490"/>
+                </a:solidFill>
+                <a:latin typeface="Calibri"/>
+              </a:rPr>
+              <a:t>3. Implement: </a:t>
+            </a:r>
+            <a:r>
+              <a:rPr sz="1300">
+                <a:solidFill>
+                  <a:srgbClr val="334155"/>
+                </a:solidFill>
+                <a:latin typeface="Calibri"/>
+              </a:rPr>
+              <a:t>Implement core web modules for outpatient triage, CPOE test ordering, laboratory bench testing with panic alerts, and eCitizen cashless billing (Paybill 222222).</a:t>
+            </a:r>
+          </a:p>
+          <a:p>
+            <a:pPr>
+              <a:spcAft>
+                <a:spcPts val="600"/>
+              </a:spcAft>
+            </a:pPr>
+            <a:r>
+              <a:rPr sz="1350" b="1">
+                <a:solidFill>
+                  <a:srgbClr val="0E7490"/>
+                </a:solidFill>
+                <a:latin typeface="Calibri"/>
+              </a:rPr>
+              <a:t>4. Evaluate: </a:t>
+            </a:r>
+            <a:r>
+              <a:rPr sz="1300">
+                <a:solidFill>
+                  <a:srgbClr val="334155"/>
+                </a:solidFill>
+                <a:latin typeface="Calibri"/>
+              </a:rPr>
+              <a:t>Evaluate system performance, data security, and user acceptance through structured test cases and hospital staff feedback.</a:t>
+            </a:r>
           </a:p>
         </p:txBody>
       </p:sp>
